--- a/enterprise-architectuur/niveau-3/deel-23/slidedeck.pptx
+++ b/enterprise-architectuur/niveau-3/deel-23/slidedeck.pptx
@@ -3029,16 +3029,40 @@
           </a:p>
         </p:txBody>
       </p:sp>
-      <p:sp>
-        <p:nvSpPr>
-          <p:cNvPr id="3" name="Text 1"/>
+      <p:pic>
+        <p:nvPicPr>
+          <p:cNvPr id="3" name="Image 0" descr="C:\Projecten\eductus.nl\enterprise-architectuur\figuren\deel-23\fig_23_1_wtp_transitie.png">    </p:cNvPr>
+          <p:cNvPicPr>
+            <a:picLocks noChangeAspect="1"/>
+          </p:cNvPicPr>
+          <p:nvPr/>
+        </p:nvPicPr>
+        <p:blipFill>
+          <a:blip r:embed="rId1"/>
+          <a:stretch>
+            <a:fillRect/>
+          </a:stretch>
+        </p:blipFill>
+        <p:spPr>
+          <a:xfrm>
+            <a:off x="1783109" y="1371600"/>
+            <a:ext cx="8622734" cy="4480560"/>
+          </a:xfrm>
+          <a:prstGeom prst="rect">
+            <a:avLst/>
+          </a:prstGeom>
+        </p:spPr>
+      </p:pic>
+      <p:sp>
+        <p:nvSpPr>
+          <p:cNvPr id="4" name="Text 1"/>
           <p:cNvSpPr/>
           <p:nvPr/>
         </p:nvSpPr>
         <p:spPr>
           <a:xfrm>
-            <a:off x="731520" y="1417320"/>
-            <a:ext cx="10332720" cy="4937760"/>
+            <a:off x="731520" y="5989320"/>
+            <a:ext cx="10698480" cy="457200"/>
           </a:xfrm>
           <a:prstGeom prst="rect">
             <a:avLst/>
@@ -3047,20 +3071,16 @@
           <a:ln/>
         </p:spPr>
         <p:txBody>
-          <a:bodyPr wrap="square" rtlCol="0" anchor="t"/>
-          <a:lstStyle/>
-          <a:p>
-            <a:pPr marL="342900" indent="-342900">
-              <a:spcAft>
-                <a:spcPts val="1200"/>
-              </a:spcAft>
-              <a:buSzPct val="100000"/>
-              <a:buChar char="•"/>
+          <a:bodyPr wrap="square" rtlCol="0" anchor="ctr"/>
+          <a:lstStyle/>
+          <a:p>
+            <a:pPr algn="ctr" indent="0" marL="0">
+              <a:buNone/>
             </a:pPr>
             <a:r>
-              <a:rPr lang="en-US" sz="1700" dirty="0">
+              <a:rPr lang="en-US" sz="1200" i="1" dirty="0">
                 <a:solidFill>
-                  <a:srgbClr val="2A2A2A"/>
+                  <a:srgbClr val="6B7280"/>
                 </a:solidFill>
                 <a:latin typeface="Calibri" pitchFamily="34" charset="0"/>
                 <a:ea typeface="Calibri" pitchFamily="34" charset="-122"/>
@@ -3068,49 +3088,7 @@
               </a:rPr>
               <a:t>De Wtp-transitie. Deadline: 1 januari 2028 — Meridiaan als laatste groep.</a:t>
             </a:r>
-            <a:endParaRPr lang="en-US" sz="1700" dirty="0"/>
-          </a:p>
-          <a:p>
-            <a:pPr marL="342900" indent="-342900">
-              <a:spcAft>
-                <a:spcPts val="1200"/>
-              </a:spcAft>
-              <a:buSzPct val="100000"/>
-              <a:buChar char="•"/>
-            </a:pPr>
-            <a:r>
-              <a:rPr lang="en-US" sz="1700" dirty="0">
-                <a:solidFill>
-                  <a:srgbClr val="2A2A2A"/>
-                </a:solidFill>
-                <a:latin typeface="Calibri" pitchFamily="34" charset="0"/>
-                <a:ea typeface="Calibri" pitchFamily="34" charset="-122"/>
-                <a:cs typeface="Calibri" pitchFamily="34" charset="-120"/>
-              </a:rPr>
-              <a:t>Drie documenten (DNB, DNB, AFM). Kernrisico: invaren en datakwaliteit.</a:t>
-            </a:r>
-            <a:endParaRPr lang="en-US" sz="1700" dirty="0"/>
-          </a:p>
-          <a:p>
-            <a:pPr marL="342900" indent="-342900">
-              <a:spcAft>
-                <a:spcPts val="1200"/>
-              </a:spcAft>
-              <a:buSzPct val="100000"/>
-              <a:buChar char="•"/>
-            </a:pPr>
-            <a:r>
-              <a:rPr lang="en-US" sz="1700" dirty="0">
-                <a:solidFill>
-                  <a:srgbClr val="2A2A2A"/>
-                </a:solidFill>
-                <a:latin typeface="Calibri" pitchFamily="34" charset="0"/>
-                <a:ea typeface="Calibri" pitchFamily="34" charset="-122"/>
-                <a:cs typeface="Calibri" pitchFamily="34" charset="-120"/>
-              </a:rPr>
-              <a:t>[FIGUUR 23-1]</a:t>
-            </a:r>
-            <a:endParaRPr lang="en-US" sz="1700" dirty="0"/>
+            <a:endParaRPr lang="en-US" sz="1200" dirty="0"/>
           </a:p>
         </p:txBody>
       </p:sp>
